--- a/dist/초3/수학/자연수계산/초3_수학_자연수계산_11_몫에0이있는나눗셈_학생용.pptx
+++ b/dist/초3/수학/자연수계산/초3_수학_자연수계산_11_몫에0이있는나눗셈_학생용.pptx
@@ -119,13 +119,13 @@
   <p:extLst>
     <p:ext uri="{521415D9-36F7-43E2-AB2F-B90AF26B5E84}">
       <p14:sectionLst xmlns:p14="http://schemas.microsoft.com/office/powerpoint/2010/main">
-        <p14:section name="도입" id="{da843016-e767-6c6f-3505-346436069741}">
+        <p14:section name="도입" id="{1db91a82-06fe-6067-f429-ed3776547d64}">
           <p14:sldIdLst>
             <p14:sldId id="256"/>
             <p14:sldId id="257"/>
           </p14:sldIdLst>
         </p14:section>
-        <p14:section name="개념" id="{20143e4a-3341-9549-d4a1-65a64353239f}">
+        <p14:section name="개념" id="{17471792-f411-bf11-6e0d-4132fecfcd71}">
           <p14:sldIdLst>
             <p14:sldId id="258"/>
             <p14:sldId id="259"/>
@@ -133,31 +133,31 @@
             <p14:sldId id="262"/>
           </p14:sldIdLst>
         </p14:section>
-        <p14:section name="연습" id="{4cc742d1-bf94-c4bb-2c30-6e8d569f6424}">
+        <p14:section name="연습" id="{3dfd113f-b33a-2f13-7e15-fb17906fc785}">
           <p14:sldIdLst>
             <p14:sldId id="261"/>
             <p14:sldId id="263"/>
             <p14:sldId id="264"/>
           </p14:sldIdLst>
         </p14:section>
-        <p14:section name="개념" id="{dad074c3-e43a-58f4-bf26-5b1f073ea6b5}">
+        <p14:section name="개념" id="{0e184855-b03f-07f8-a494-101a850b63da}">
           <p14:sldIdLst/>
         </p14:section>
-        <p14:section name="연습" id="{321aaa3d-4d36-9bad-0a82-aa3618dfe603}">
+        <p14:section name="연습" id="{8ac67e28-e52f-f085-194c-8ba2426bb2cd}">
           <p14:sldIdLst/>
         </p14:section>
-        <p14:section name="확인" id="{4e8ebe7f-b364-f77f-d161-8572e2a7c91b}">
+        <p14:section name="확인" id="{b56e4d58-4d8f-2443-907b-2ecc2699f8cf}">
           <p14:sldIdLst>
             <p14:sldId id="265"/>
             <p14:sldId id="266"/>
           </p14:sldIdLst>
         </p14:section>
-        <p14:section name="정리" id="{11d6a17c-2e46-c90d-fe1f-00747e34b081}">
+        <p14:section name="정리" id="{64692509-0406-6efa-2909-577c68db7306}">
           <p14:sldIdLst>
             <p14:sldId id="267"/>
           </p14:sldIdLst>
         </p14:section>
-        <p14:section name="보충" id="{1d420040-e0a8-16ca-bbd1-d8a4b8a3bff5}">
+        <p14:section name="보충" id="{4afc7e90-cb48-af74-cff2-6853c5e882ad}">
           <p14:sldIdLst>
             <p14:sldId id="268"/>
           </p14:sldIdLst>
